--- a/125/slides/OPS-WG-Updates-NMOP.pptx
+++ b/125/slides/OPS-WG-Updates-NMOP.pptx
@@ -128,12 +128,12 @@
   <pc:docChgLst>
     <pc:chgData name="Graf Thomas, SCS-INI-NET-VNC-E2E" userId="487bc3e3-9ce7-4cdd-b7b4-8899ea88d289" providerId="ADAL" clId="{ADEEF08A-D719-4B50-A383-4105EDA2C206}"/>
     <pc:docChg chg="undo custSel modSld">
-      <pc:chgData name="Graf Thomas, SCS-INI-NET-VNC-E2E" userId="487bc3e3-9ce7-4cdd-b7b4-8899ea88d289" providerId="ADAL" clId="{ADEEF08A-D719-4B50-A383-4105EDA2C206}" dt="2026-03-08T11:01:21.295" v="1339" actId="6549"/>
+      <pc:chgData name="Graf Thomas, SCS-INI-NET-VNC-E2E" userId="487bc3e3-9ce7-4cdd-b7b4-8899ea88d289" providerId="ADAL" clId="{ADEEF08A-D719-4B50-A383-4105EDA2C206}" dt="2026-03-08T11:05:15.959" v="1340" actId="20577"/>
       <pc:docMkLst>
         <pc:docMk/>
       </pc:docMkLst>
       <pc:sldChg chg="modSp mod">
-        <pc:chgData name="Graf Thomas, SCS-INI-NET-VNC-E2E" userId="487bc3e3-9ce7-4cdd-b7b4-8899ea88d289" providerId="ADAL" clId="{ADEEF08A-D719-4B50-A383-4105EDA2C206}" dt="2026-03-08T11:01:21.295" v="1339" actId="6549"/>
+        <pc:chgData name="Graf Thomas, SCS-INI-NET-VNC-E2E" userId="487bc3e3-9ce7-4cdd-b7b4-8899ea88d289" providerId="ADAL" clId="{ADEEF08A-D719-4B50-A383-4105EDA2C206}" dt="2026-03-08T11:05:15.959" v="1340" actId="20577"/>
         <pc:sldMkLst>
           <pc:docMk/>
           <pc:sldMk cId="2180883231" sldId="258"/>
@@ -144,6 +144,14 @@
             <pc:docMk/>
             <pc:sldMk cId="2180883231" sldId="258"/>
             <ac:spMk id="3" creationId="{5082E14F-0499-0D67-CCEB-98C164D73BB5}"/>
+          </ac:spMkLst>
+        </pc:spChg>
+        <pc:spChg chg="mod">
+          <ac:chgData name="Graf Thomas, SCS-INI-NET-VNC-E2E" userId="487bc3e3-9ce7-4cdd-b7b4-8899ea88d289" providerId="ADAL" clId="{ADEEF08A-D719-4B50-A383-4105EDA2C206}" dt="2026-03-08T11:05:15.959" v="1340" actId="20577"/>
+          <ac:spMkLst>
+            <pc:docMk/>
+            <pc:sldMk cId="2180883231" sldId="258"/>
+            <ac:spMk id="5" creationId="{CBE55EBD-1B16-433A-2B82-E65DC5EA1A56}"/>
           </ac:spMkLst>
         </pc:spChg>
       </pc:sldChg>
@@ -4144,7 +4152,7 @@
           <a:p>
             <a:r>
               <a:rPr lang="en-US" dirty="0"/>
-              <a:t>State of the OPSAREA Nation (IETF#124)</a:t>
+              <a:t>State of the OPSAREA Nation (IETF#125)</a:t>
             </a:r>
           </a:p>
         </p:txBody>
